--- a/teaching/csci112-spring-2024/lectures/ppts/CSCI_112_Programming_with_C_20240117.pptx
+++ b/teaching/csci112-spring-2024/lectures/ppts/CSCI_112_Programming_with_C_20240117.pptx
@@ -25748,7 +25748,7 @@
                 <a:ea typeface="Microsoft YaHei Light" panose="020B0502040204020203" charset="-122"/>
                 <a:cs typeface="Arial" panose="020B0604020202020204" pitchFamily="34" charset="0"/>
               </a:rPr>
-              <a:t>Vulnaerability Analysis</a:t>
+              <a:t>Vulnerability Analysis</a:t>
             </a:r>
             <a:endParaRPr lang="en-US" altLang="zh-CN" sz="1500">
               <a:solidFill>
@@ -25844,7 +25844,7 @@
                 <a:ea typeface="Microsoft YaHei Light" panose="020B0502040204020203" charset="-122"/>
                 <a:cs typeface="Arial" panose="020B0604020202020204" pitchFamily="34" charset="0"/>
               </a:rPr>
-              <a:t>Vulnaerability Analysis</a:t>
+              <a:t>Vulnerability Analysis</a:t>
             </a:r>
             <a:endParaRPr lang="en-US" altLang="zh-CN" sz="1500">
               <a:solidFill>

--- a/teaching/csci112-spring-2024/lectures/ppts/CSCI_112_Programming_with_C_20240117.pptx
+++ b/teaching/csci112-spring-2024/lectures/ppts/CSCI_112_Programming_with_C_20240117.pptx
@@ -15816,7 +15816,7 @@
                 <a:latin typeface="Arial" panose="020B0604020202020204" pitchFamily="34" charset="0"/>
                 <a:cs typeface="Arial" panose="020B0604020202020204" pitchFamily="34" charset="0"/>
               </a:rPr>
-              <a:t>To run a course of this size we cannot accommodate individual requests for extensions on assignments; therefore, we have strict rules for when assignments are due, but have some leeway built in. Please read the bullet points below carefully, respect the policy, and get help early if you are having any problems. </a:t>
+              <a:t>To run a course of this size we cannot accommodate individual requests for extensions on assignments; therefore, we have strict rules for when assignments are due, but have some leeway built in. </a:t>
             </a:r>
             <a:endParaRPr lang="en-US" sz="3000">
               <a:latin typeface="Arial" panose="020B0604020202020204" pitchFamily="34" charset="0"/>
